--- a/word-drafts/figures/Observability-Fig8-Health-Tree.pptx
+++ b/word-drafts/figures/Observability-Fig8-Health-Tree.pptx
@@ -3461,7 +3461,7 @@
         <p:spPr>
           <a:xfrm>
             <a:off x="2024062" y="2314575"/>
-            <a:ext cx="485775" cy="123825"/>
+            <a:ext cx="609600" cy="123825"/>
           </a:xfrm>
           <a:prstGeom prst="rect">
             <a:avLst/>
